--- a/test-corpus/files/pptx-noncompliant.pptx
+++ b/test-corpus/files/pptx-noncompliant.pptx
@@ -3118,7 +3118,7 @@
       </p:sp>
       <p:pic>
         <p:nvPicPr>
-          <p:cNvPr id="3" name="Picture 2" descr="_img.png"/>
+          <p:cNvPr id="3" name="Picture 2"/>
           <p:cNvPicPr>
             <a:picLocks noChangeAspect="1"/>
           </p:cNvPicPr>
